--- a/sqlserver-sql/presentation/sqlserver-dql-basic-operators.pptx
+++ b/sqlserver-sql/presentation/sqlserver-dql-basic-operators.pptx
@@ -7711,7 +7711,7 @@
                 </a:solidFill>
                 <a:latin typeface="Courier"/>
               </a:rPr>
-              <a:t>-- Retrieve employees from departments 10 and 20</a:t>
+              <a:t>-- Retrieve employees from departments 10, 20, and 30</a:t>
             </a:r>
             <a:br>
               <a:rPr sz="1400" dirty="0"/>
@@ -8080,7 +8080,7 @@
                 </a:solidFill>
                 <a:latin typeface="Courier"/>
               </a:rPr>
-              <a:t>-- Retrieve employees not from departments 10 and 20</a:t>
+              <a:t>-- Retrieve employees not from departments 10, 20, and 30</a:t>
             </a:r>
             <a:br>
               <a:rPr sz="1400" dirty="0"/>
